--- a/备选资产/结构图/文献理论整合框架-001/example.pptx
+++ b/备选资产/结构图/文献理论整合框架-001/example.pptx
@@ -2,13 +2,13 @@
 <file path=ppt/presentation.xml><?xml version="1.0" encoding="utf-8"?>
 <p:presentation xmlns:p="http://schemas.openxmlformats.org/presentationml/2006/main">
   <p:sldMasterIdLst>
-    <p:sldMasterId xmlns:r="http://schemas.openxmlformats.org/officeDocument/2006/relationships" id="2147483648" r:id="Ra6fad60881874f77"/>
+    <p:sldMasterId xmlns:r="http://schemas.openxmlformats.org/officeDocument/2006/relationships" id="2147483648" r:id="R04966a38c52142ff"/>
   </p:sldMasterIdLst>
   <p:notesMasterIdLst>
-    <p:notesMasterId xmlns:r="http://schemas.openxmlformats.org/officeDocument/2006/relationships" r:id="R522d555c100f444e"/>
+    <p:notesMasterId xmlns:r="http://schemas.openxmlformats.org/officeDocument/2006/relationships" r:id="R1b862da2bd1d45bc"/>
   </p:notesMasterIdLst>
   <p:sldIdLst>
-    <p:sldId xmlns:r="http://schemas.openxmlformats.org/officeDocument/2006/relationships" id="256" r:id="Rf9e2236670bc4a76"/>
+    <p:sldId xmlns:r="http://schemas.openxmlformats.org/officeDocument/2006/relationships" id="256" r:id="R751473dd5241440b"/>
   </p:sldIdLst>
   <p:sldSz cx="12192000" cy="6858000"/>
   <p:notesSz cx="6858000" cy="9144000"/>
@@ -506,7 +506,7 @@
   </p:cSld>
   <p:clrMap bg1="lt1" tx1="dk1" bg2="lt2" tx2="dk2" accent1="accent1" accent2="accent2" accent3="accent3" accent4="accent4" accent5="accent5" accent6="accent6" hlink="hlink" folHlink="folHlink"/>
   <p:sldLayoutIdLst>
-    <p:sldLayoutId xmlns:r="http://schemas.openxmlformats.org/officeDocument/2006/relationships" id="2147483649" r:id="R7a6aa6ddf44b4ea8"/>
+    <p:sldLayoutId xmlns:r="http://schemas.openxmlformats.org/officeDocument/2006/relationships" id="2147483649" r:id="Rc02ce54bd21f4932"/>
   </p:sldLayoutIdLst>
   <p:txStyles>
     <p:titleStyle>
@@ -1054,10 +1054,10 @@
       </p:grpSpPr>
       <p:sp>
         <p:nvSpPr>
-          <p:cNvPr id="24" name="">
+          <p:cNvPr id="21" name="">
             <a:extLst xmlns:a="http://schemas.openxmlformats.org/drawingml/2006/main">
               <a:ext uri="{FF2B5EF4-FFF2-40B4-BE49-F238E27FC236}">
-                <a16:creationId xmlns:a16="http://schemas.microsoft.com/office/drawing/2014/main" id="{2928CDCD-574A-4312-8495-E759D1F686B9}"/>
+                <a16:creationId xmlns:a16="http://schemas.microsoft.com/office/drawing/2014/main" id="{776AB0A5-3A33-4B0E-9A1A-DDA5DDD8FA18}"/>
               </a:ext>
             </a:extLst>
           </p:cNvPr>
@@ -1115,7 +1115,7 @@
           <p:cNvPr id="2" name="">
             <a:extLst xmlns:a="http://schemas.openxmlformats.org/drawingml/2006/main">
               <a:ext uri="{FF2B5EF4-FFF2-40B4-BE49-F238E27FC236}">
-                <a16:creationId xmlns:a16="http://schemas.microsoft.com/office/drawing/2014/main" id="{855B8397-ECE4-4E63-99EC-1FCD574F0FCE}"/>
+                <a16:creationId xmlns:a16="http://schemas.microsoft.com/office/drawing/2014/main" id="{D9FCCD4C-010C-429D-821E-2067EABB12C8}"/>
               </a:ext>
             </a:extLst>
           </p:cNvPr>
@@ -1173,7 +1173,7 @@
           <p:cNvPr id="3" name="">
             <a:extLst xmlns:a="http://schemas.openxmlformats.org/drawingml/2006/main">
               <a:ext uri="{FF2B5EF4-FFF2-40B4-BE49-F238E27FC236}">
-                <a16:creationId xmlns:a16="http://schemas.microsoft.com/office/drawing/2014/main" id="{FC206FDB-6C34-4156-8AB8-03C964498D4A}"/>
+                <a16:creationId xmlns:a16="http://schemas.microsoft.com/office/drawing/2014/main" id="{6C381295-E32B-4ACC-832B-12972190AE7E}"/>
               </a:ext>
             </a:extLst>
           </p:cNvPr>
@@ -1184,8 +1184,8 @@
         </p:nvSpPr>
         <p:spPr>
           <a:xfrm xmlns:a="http://schemas.openxmlformats.org/drawingml/2006/main" flipH="0" flipV="0">
-            <a:off x="2381250" y="2857500"/>
-            <a:ext cx="7429500" cy="0"/>
+            <a:off x="2333625" y="2667000"/>
+            <a:ext cx="7524750" cy="0"/>
           </a:xfrm>
           <a:prstGeom xmlns:a="http://schemas.openxmlformats.org/drawingml/2006/main" prst="line">
             <a:avLst/>
@@ -1193,7 +1193,7 @@
           <a:noFill xmlns:a="http://schemas.openxmlformats.org/drawingml/2006/main"/>
           <a:ln xmlns:a="http://schemas.openxmlformats.org/drawingml/2006/main" w="28575">
             <a:solidFill>
-              <a:srgbClr val="1677C8"/>
+              <a:srgbClr val="8FC2EF"/>
             </a:solidFill>
             <a:prstDash val="solid"/>
           </a:ln>
@@ -1204,7 +1204,7 @@
           <p:cNvPr id="4" name="">
             <a:extLst xmlns:a="http://schemas.openxmlformats.org/drawingml/2006/main">
               <a:ext uri="{FF2B5EF4-FFF2-40B4-BE49-F238E27FC236}">
-                <a16:creationId xmlns:a16="http://schemas.microsoft.com/office/drawing/2014/main" id="{A80D2F27-AED9-4F09-BFCC-18A3D6263B04}"/>
+                <a16:creationId xmlns:a16="http://schemas.microsoft.com/office/drawing/2014/main" id="{3346AE77-865F-4096-9231-8D9CED14AC26}"/>
               </a:ext>
             </a:extLst>
           </p:cNvPr>
@@ -1214,17 +1214,17 @@
           <p:nvPr/>
         </p:nvSpPr>
         <p:spPr>
-          <a:xfrm xmlns:a="http://schemas.openxmlformats.org/drawingml/2006/main" flipH="0" flipV="0">
-            <a:off x="2381250" y="2857500"/>
-            <a:ext cx="3714750" cy="809625"/>
+          <a:xfrm xmlns:a="http://schemas.openxmlformats.org/drawingml/2006/main" flipH="1" flipV="0">
+            <a:off x="6096000" y="2667000"/>
+            <a:ext cx="3762375" cy="2971800"/>
           </a:xfrm>
           <a:prstGeom xmlns:a="http://schemas.openxmlformats.org/drawingml/2006/main" prst="line">
             <a:avLst/>
           </a:prstGeom>
           <a:noFill xmlns:a="http://schemas.openxmlformats.org/drawingml/2006/main"/>
-          <a:ln xmlns:a="http://schemas.openxmlformats.org/drawingml/2006/main" w="14288">
+          <a:ln xmlns:a="http://schemas.openxmlformats.org/drawingml/2006/main" w="28575">
             <a:solidFill>
-              <a:srgbClr val="C6D6E5"/>
+              <a:srgbClr val="4D9BE0"/>
             </a:solidFill>
             <a:prstDash val="solid"/>
           </a:ln>
@@ -1235,7 +1235,7 @@
           <p:cNvPr id="5" name="">
             <a:extLst xmlns:a="http://schemas.openxmlformats.org/drawingml/2006/main">
               <a:ext uri="{FF2B5EF4-FFF2-40B4-BE49-F238E27FC236}">
-                <a16:creationId xmlns:a16="http://schemas.microsoft.com/office/drawing/2014/main" id="{CAD04015-D440-4F91-A311-064A99779E38}"/>
+                <a16:creationId xmlns:a16="http://schemas.microsoft.com/office/drawing/2014/main" id="{1AA83F8B-C00C-478A-9084-BFBC3B430267}"/>
               </a:ext>
             </a:extLst>
           </p:cNvPr>
@@ -1245,9 +1245,9 @@
           <p:nvPr/>
         </p:nvSpPr>
         <p:spPr>
-          <a:xfrm xmlns:a="http://schemas.openxmlformats.org/drawingml/2006/main" flipH="1" flipV="0">
-            <a:off x="6096000" y="2857500"/>
-            <a:ext cx="3714750" cy="2667000"/>
+          <a:xfrm xmlns:a="http://schemas.openxmlformats.org/drawingml/2006/main" flipH="1" flipV="1">
+            <a:off x="2333625" y="2667000"/>
+            <a:ext cx="3762375" cy="2971800"/>
           </a:xfrm>
           <a:prstGeom xmlns:a="http://schemas.openxmlformats.org/drawingml/2006/main" prst="line">
             <a:avLst/>
@@ -1255,7 +1255,7 @@
           <a:noFill xmlns:a="http://schemas.openxmlformats.org/drawingml/2006/main"/>
           <a:ln xmlns:a="http://schemas.openxmlformats.org/drawingml/2006/main" w="28575">
             <a:solidFill>
-              <a:srgbClr val="00A8D8"/>
+              <a:srgbClr val="8FC2EF"/>
             </a:solidFill>
             <a:prstDash val="solid"/>
           </a:ln>
@@ -1266,7 +1266,7 @@
           <p:cNvPr id="6" name="">
             <a:extLst xmlns:a="http://schemas.openxmlformats.org/drawingml/2006/main">
               <a:ext uri="{FF2B5EF4-FFF2-40B4-BE49-F238E27FC236}">
-                <a16:creationId xmlns:a16="http://schemas.microsoft.com/office/drawing/2014/main" id="{65F149F7-DD4F-45E8-9530-7CA05DCF8C37}"/>
+                <a16:creationId xmlns:a16="http://schemas.microsoft.com/office/drawing/2014/main" id="{80D03271-8C85-42CF-A184-D15130D2E2C0}"/>
               </a:ext>
             </a:extLst>
           </p:cNvPr>
@@ -1276,28 +1276,42 @@
           <p:nvPr/>
         </p:nvSpPr>
         <p:spPr>
-          <a:xfrm xmlns:a="http://schemas.openxmlformats.org/drawingml/2006/main" flipH="1" flipV="0">
-            <a:off x="6096000" y="2857500"/>
-            <a:ext cx="3714750" cy="809625"/>
+          <a:xfrm xmlns:a="http://schemas.openxmlformats.org/drawingml/2006/main">
+            <a:off x="3943350" y="2857500"/>
+            <a:ext cx="4305300" cy="1752600"/>
           </a:xfrm>
-          <a:prstGeom xmlns:a="http://schemas.openxmlformats.org/drawingml/2006/main" prst="line">
+          <a:prstGeom xmlns:a="http://schemas.openxmlformats.org/drawingml/2006/main" prst="ellipse">
             <a:avLst/>
           </a:prstGeom>
-          <a:noFill xmlns:a="http://schemas.openxmlformats.org/drawingml/2006/main"/>
-          <a:ln xmlns:a="http://schemas.openxmlformats.org/drawingml/2006/main" w="14288">
-            <a:solidFill>
-              <a:srgbClr val="C6D6E5"/>
-            </a:solidFill>
+          <a:gradFill xmlns:a="http://schemas.openxmlformats.org/drawingml/2006/main">
+            <a:gsLst>
+              <a:gs pos="0">
+                <a:srgbClr val="EFF6FC"/>
+              </a:gs>
+              <a:gs pos="100000">
+                <a:srgbClr val="D9E9F7"/>
+              </a:gs>
+            </a:gsLst>
+            <a:lin ang="10800000"/>
+          </a:gradFill>
+          <a:ln xmlns:a="http://schemas.openxmlformats.org/drawingml/2006/main" w="0">
+            <a:noFill/>
             <a:prstDash val="solid"/>
           </a:ln>
         </p:spPr>
-      </p:sp>
-      <p:sp>
-        <p:nvSpPr>
-          <p:cNvPr id="7" name="">
+        <p:style>
+          <a:lnRef xmlns:a="http://schemas.openxmlformats.org/drawingml/2006/main" idx="0"/>
+          <a:fillRef xmlns:a="http://schemas.openxmlformats.org/drawingml/2006/main" idx="0"/>
+          <a:effectRef xmlns:a="http://schemas.openxmlformats.org/drawingml/2006/main" idx="6"/>
+          <a:fontRef xmlns:a="http://schemas.openxmlformats.org/drawingml/2006/main" idx="major"/>
+        </p:style>
+      </p:sp>
+      <p:sp>
+        <p:nvSpPr>
+          <p:cNvPr id="7" name="PPAGENT_QA|parent=theory-criterion-0|domains=theory-criteria">
             <a:extLst xmlns:a="http://schemas.openxmlformats.org/drawingml/2006/main">
               <a:ext uri="{FF2B5EF4-FFF2-40B4-BE49-F238E27FC236}">
-                <a16:creationId xmlns:a16="http://schemas.microsoft.com/office/drawing/2014/main" id="{2A2717A4-B84A-4843-AAF0-012EF2F8C464}"/>
+                <a16:creationId xmlns:a16="http://schemas.microsoft.com/office/drawing/2014/main" id="{24B4F713-BF47-4788-9E33-C9A18F637D93}"/>
               </a:ext>
             </a:extLst>
           </p:cNvPr>
@@ -1307,108 +1321,9 @@
           <p:nvPr/>
         </p:nvSpPr>
         <p:spPr>
-          <a:xfrm xmlns:a="http://schemas.openxmlformats.org/drawingml/2006/main" flipH="1" flipV="1">
-            <a:off x="2381250" y="2857500"/>
-            <a:ext cx="3714750" cy="2667000"/>
-          </a:xfrm>
-          <a:prstGeom xmlns:a="http://schemas.openxmlformats.org/drawingml/2006/main" prst="line">
-            <a:avLst/>
-          </a:prstGeom>
-          <a:noFill xmlns:a="http://schemas.openxmlformats.org/drawingml/2006/main"/>
-          <a:ln xmlns:a="http://schemas.openxmlformats.org/drawingml/2006/main" w="28575">
-            <a:solidFill>
-              <a:srgbClr val="1677C8"/>
-            </a:solidFill>
-            <a:prstDash val="solid"/>
-          </a:ln>
-        </p:spPr>
-      </p:sp>
-      <p:sp>
-        <p:nvSpPr>
-          <p:cNvPr id="8" name="">
-            <a:extLst xmlns:a="http://schemas.openxmlformats.org/drawingml/2006/main">
-              <a:ext uri="{FF2B5EF4-FFF2-40B4-BE49-F238E27FC236}">
-                <a16:creationId xmlns:a16="http://schemas.microsoft.com/office/drawing/2014/main" id="{BF298E26-72C3-4D20-98F3-6E69E5485ACE}"/>
-              </a:ext>
-            </a:extLst>
-          </p:cNvPr>
-          <p:cNvSpPr>
-            <a:spLocks xmlns:a="http://schemas.openxmlformats.org/drawingml/2006/main" noGrp="1"/>
-          </p:cNvSpPr>
-          <p:nvPr/>
-        </p:nvSpPr>
-        <p:spPr>
-          <a:xfrm xmlns:a="http://schemas.openxmlformats.org/drawingml/2006/main" flipH="0" flipV="1">
-            <a:off x="6096000" y="3667125"/>
-            <a:ext cx="0" cy="1857375"/>
-          </a:xfrm>
-          <a:prstGeom xmlns:a="http://schemas.openxmlformats.org/drawingml/2006/main" prst="line">
-            <a:avLst/>
-          </a:prstGeom>
-          <a:noFill xmlns:a="http://schemas.openxmlformats.org/drawingml/2006/main"/>
-          <a:ln xmlns:a="http://schemas.openxmlformats.org/drawingml/2006/main" w="14288">
-            <a:solidFill>
-              <a:srgbClr val="C6D6E5"/>
-            </a:solidFill>
-            <a:prstDash val="solid"/>
-          </a:ln>
-        </p:spPr>
-      </p:sp>
-      <p:sp>
-        <p:nvSpPr>
-          <p:cNvPr id="9" name="">
-            <a:extLst xmlns:a="http://schemas.openxmlformats.org/drawingml/2006/main">
-              <a:ext uri="{FF2B5EF4-FFF2-40B4-BE49-F238E27FC236}">
-                <a16:creationId xmlns:a16="http://schemas.microsoft.com/office/drawing/2014/main" id="{AAB271B9-990B-4782-B19E-987C04C2F6D2}"/>
-              </a:ext>
-            </a:extLst>
-          </p:cNvPr>
-          <p:cNvSpPr>
-            <a:spLocks xmlns:a="http://schemas.openxmlformats.org/drawingml/2006/main" noGrp="1"/>
-          </p:cNvSpPr>
-          <p:nvPr/>
-        </p:nvSpPr>
-        <p:spPr>
           <a:xfrm xmlns:a="http://schemas.openxmlformats.org/drawingml/2006/main">
-            <a:off x="4095750" y="2857500"/>
-            <a:ext cx="4000500" cy="1619250"/>
-          </a:xfrm>
-          <a:prstGeom xmlns:a="http://schemas.openxmlformats.org/drawingml/2006/main" prst="ellipse">
-            <a:avLst/>
-          </a:prstGeom>
-          <a:solidFill xmlns:a="http://schemas.openxmlformats.org/drawingml/2006/main">
-            <a:srgbClr val="E8F1F9"/>
-          </a:solidFill>
-          <a:ln xmlns:a="http://schemas.openxmlformats.org/drawingml/2006/main" w="0">
-            <a:noFill/>
-            <a:prstDash val="solid"/>
-          </a:ln>
-        </p:spPr>
-        <p:style>
-          <a:lnRef xmlns:a="http://schemas.openxmlformats.org/drawingml/2006/main" idx="0"/>
-          <a:fillRef xmlns:a="http://schemas.openxmlformats.org/drawingml/2006/main" idx="0"/>
-          <a:effectRef xmlns:a="http://schemas.openxmlformats.org/drawingml/2006/main" idx="4"/>
-          <a:fontRef xmlns:a="http://schemas.openxmlformats.org/drawingml/2006/main" idx="major"/>
-        </p:style>
-      </p:sp>
-      <p:sp>
-        <p:nvSpPr>
-          <p:cNvPr id="10" name="">
-            <a:extLst xmlns:a="http://schemas.openxmlformats.org/drawingml/2006/main">
-              <a:ext uri="{FF2B5EF4-FFF2-40B4-BE49-F238E27FC236}">
-                <a16:creationId xmlns:a16="http://schemas.microsoft.com/office/drawing/2014/main" id="{0C0FFB74-D1B3-46BB-A461-4A3722EA7C7F}"/>
-              </a:ext>
-            </a:extLst>
-          </p:cNvPr>
-          <p:cNvSpPr>
-            <a:spLocks xmlns:a="http://schemas.openxmlformats.org/drawingml/2006/main" noGrp="1"/>
-          </p:cNvSpPr>
-          <p:nvPr/>
-        </p:nvSpPr>
-        <p:spPr>
-          <a:xfrm xmlns:a="http://schemas.openxmlformats.org/drawingml/2006/main">
-            <a:off x="4495800" y="3124200"/>
-            <a:ext cx="990600" cy="438150"/>
+            <a:off x="4381500" y="3143250"/>
+            <a:ext cx="1066800" cy="438150"/>
           </a:xfrm>
           <a:prstGeom xmlns:a="http://schemas.openxmlformats.org/drawingml/2006/main" prst="roundRect">
             <a:avLst>
@@ -1436,7 +1351,7 @@
           <a:lstStyle xmlns:a="http://schemas.openxmlformats.org/drawingml/2006/main"/>
           <a:p xmlns:a="http://schemas.openxmlformats.org/drawingml/2006/main">
             <a:pPr algn="ctr">
-              <a:defRPr sz="1050" b="1">
+              <a:defRPr sz="1200" b="1">
                 <a:solidFill>
                   <a:srgbClr val="FFFFFF"/>
                 </a:solidFill>
@@ -1446,7 +1361,7 @@
               </a:defRPr>
             </a:pPr>
             <a:r>
-              <a:rPr sz="1050" b="1">
+              <a:rPr sz="1200" b="1">
                 <a:solidFill>
                   <a:srgbClr val="FFFFFF"/>
                 </a:solidFill>
@@ -1461,10 +1376,10 @@
       </p:sp>
       <p:sp>
         <p:nvSpPr>
-          <p:cNvPr id="11" name="">
+          <p:cNvPr id="8" name="PPAGENT_QA|parent=theory-criterion-1|domains=theory-criteria">
             <a:extLst xmlns:a="http://schemas.openxmlformats.org/drawingml/2006/main">
               <a:ext uri="{FF2B5EF4-FFF2-40B4-BE49-F238E27FC236}">
-                <a16:creationId xmlns:a16="http://schemas.microsoft.com/office/drawing/2014/main" id="{3791CA81-BFC5-4F66-AD48-2F65FD97654D}"/>
+                <a16:creationId xmlns:a16="http://schemas.microsoft.com/office/drawing/2014/main" id="{359FE706-C0D2-46DC-AEAE-C8086D90BC5C}"/>
               </a:ext>
             </a:extLst>
           </p:cNvPr>
@@ -1475,8 +1390,8 @@
         </p:nvSpPr>
         <p:spPr>
           <a:xfrm xmlns:a="http://schemas.openxmlformats.org/drawingml/2006/main">
-            <a:off x="5600700" y="3124200"/>
-            <a:ext cx="990600" cy="438150"/>
+            <a:off x="5562600" y="3143250"/>
+            <a:ext cx="1066800" cy="438150"/>
           </a:xfrm>
           <a:prstGeom xmlns:a="http://schemas.openxmlformats.org/drawingml/2006/main" prst="roundRect">
             <a:avLst>
@@ -1504,7 +1419,7 @@
           <a:lstStyle xmlns:a="http://schemas.openxmlformats.org/drawingml/2006/main"/>
           <a:p xmlns:a="http://schemas.openxmlformats.org/drawingml/2006/main">
             <a:pPr algn="ctr">
-              <a:defRPr sz="1050" b="1">
+              <a:defRPr sz="1200" b="1">
                 <a:solidFill>
                   <a:srgbClr val="FFFFFF"/>
                 </a:solidFill>
@@ -1514,7 +1429,7 @@
               </a:defRPr>
             </a:pPr>
             <a:r>
-              <a:rPr sz="1050" b="1">
+              <a:rPr sz="1200" b="1">
                 <a:solidFill>
                   <a:srgbClr val="FFFFFF"/>
                 </a:solidFill>
@@ -1529,10 +1444,10 @@
       </p:sp>
       <p:sp>
         <p:nvSpPr>
-          <p:cNvPr id="12" name="">
+          <p:cNvPr id="9" name="PPAGENT_QA|parent=theory-criterion-2|domains=theory-criteria">
             <a:extLst xmlns:a="http://schemas.openxmlformats.org/drawingml/2006/main">
               <a:ext uri="{FF2B5EF4-FFF2-40B4-BE49-F238E27FC236}">
-                <a16:creationId xmlns:a16="http://schemas.microsoft.com/office/drawing/2014/main" id="{78C86449-B357-4900-9574-54DA572F79B3}"/>
+                <a16:creationId xmlns:a16="http://schemas.microsoft.com/office/drawing/2014/main" id="{B57F12E1-F632-47C5-A8DC-3BF07FA6B589}"/>
               </a:ext>
             </a:extLst>
           </p:cNvPr>
@@ -1543,8 +1458,8 @@
         </p:nvSpPr>
         <p:spPr>
           <a:xfrm xmlns:a="http://schemas.openxmlformats.org/drawingml/2006/main">
-            <a:off x="6705600" y="3124200"/>
-            <a:ext cx="990600" cy="438150"/>
+            <a:off x="6743700" y="3143250"/>
+            <a:ext cx="1066800" cy="438150"/>
           </a:xfrm>
           <a:prstGeom xmlns:a="http://schemas.openxmlformats.org/drawingml/2006/main" prst="roundRect">
             <a:avLst>
@@ -1572,7 +1487,7 @@
           <a:lstStyle xmlns:a="http://schemas.openxmlformats.org/drawingml/2006/main"/>
           <a:p xmlns:a="http://schemas.openxmlformats.org/drawingml/2006/main">
             <a:pPr algn="ctr">
-              <a:defRPr sz="1050" b="1">
+              <a:defRPr sz="1200" b="1">
                 <a:solidFill>
                   <a:srgbClr val="FFFFFF"/>
                 </a:solidFill>
@@ -1582,7 +1497,7 @@
               </a:defRPr>
             </a:pPr>
             <a:r>
-              <a:rPr sz="1050" b="1">
+              <a:rPr sz="1200" b="1">
                 <a:solidFill>
                   <a:srgbClr val="FFFFFF"/>
                 </a:solidFill>
@@ -1597,10 +1512,10 @@
       </p:sp>
       <p:sp>
         <p:nvSpPr>
-          <p:cNvPr id="13" name="">
+          <p:cNvPr id="10" name="PPAGENT_QA|parent=theory-criterion-3|domains=theory-criteria">
             <a:extLst xmlns:a="http://schemas.openxmlformats.org/drawingml/2006/main">
               <a:ext uri="{FF2B5EF4-FFF2-40B4-BE49-F238E27FC236}">
-                <a16:creationId xmlns:a16="http://schemas.microsoft.com/office/drawing/2014/main" id="{F1DB9989-1732-461A-AB2D-9F79F5E293EA}"/>
+                <a16:creationId xmlns:a16="http://schemas.microsoft.com/office/drawing/2014/main" id="{1204A27A-3C16-4A68-82E7-4B7DAF1F56D2}"/>
               </a:ext>
             </a:extLst>
           </p:cNvPr>
@@ -1611,8 +1526,8 @@
         </p:nvSpPr>
         <p:spPr>
           <a:xfrm xmlns:a="http://schemas.openxmlformats.org/drawingml/2006/main">
-            <a:off x="5048250" y="3733800"/>
-            <a:ext cx="990600" cy="438150"/>
+            <a:off x="4972050" y="3752850"/>
+            <a:ext cx="1066800" cy="438150"/>
           </a:xfrm>
           <a:prstGeom xmlns:a="http://schemas.openxmlformats.org/drawingml/2006/main" prst="roundRect">
             <a:avLst>
@@ -1640,7 +1555,7 @@
           <a:lstStyle xmlns:a="http://schemas.openxmlformats.org/drawingml/2006/main"/>
           <a:p xmlns:a="http://schemas.openxmlformats.org/drawingml/2006/main">
             <a:pPr algn="ctr">
-              <a:defRPr sz="1050" b="1">
+              <a:defRPr sz="1200" b="1">
                 <a:solidFill>
                   <a:srgbClr val="FFFFFF"/>
                 </a:solidFill>
@@ -1650,7 +1565,7 @@
               </a:defRPr>
             </a:pPr>
             <a:r>
-              <a:rPr sz="1050" b="1">
+              <a:rPr sz="1200" b="1">
                 <a:solidFill>
                   <a:srgbClr val="FFFFFF"/>
                 </a:solidFill>
@@ -1665,10 +1580,10 @@
       </p:sp>
       <p:sp>
         <p:nvSpPr>
-          <p:cNvPr id="14" name="">
+          <p:cNvPr id="11" name="PPAGENT_QA|parent=theory-criterion-4|domains=theory-criteria">
             <a:extLst xmlns:a="http://schemas.openxmlformats.org/drawingml/2006/main">
               <a:ext uri="{FF2B5EF4-FFF2-40B4-BE49-F238E27FC236}">
-                <a16:creationId xmlns:a16="http://schemas.microsoft.com/office/drawing/2014/main" id="{4002EAEF-53F9-4DCD-8768-EFF626349091}"/>
+                <a16:creationId xmlns:a16="http://schemas.microsoft.com/office/drawing/2014/main" id="{0EBD184A-3542-471B-AFF1-FAE33C7C61C6}"/>
               </a:ext>
             </a:extLst>
           </p:cNvPr>
@@ -1679,8 +1594,8 @@
         </p:nvSpPr>
         <p:spPr>
           <a:xfrm xmlns:a="http://schemas.openxmlformats.org/drawingml/2006/main">
-            <a:off x="6153150" y="3733800"/>
-            <a:ext cx="990600" cy="438150"/>
+            <a:off x="6153150" y="3752850"/>
+            <a:ext cx="1066800" cy="438150"/>
           </a:xfrm>
           <a:prstGeom xmlns:a="http://schemas.openxmlformats.org/drawingml/2006/main" prst="roundRect">
             <a:avLst>
@@ -1708,7 +1623,7 @@
           <a:lstStyle xmlns:a="http://schemas.openxmlformats.org/drawingml/2006/main"/>
           <a:p xmlns:a="http://schemas.openxmlformats.org/drawingml/2006/main">
             <a:pPr algn="ctr">
-              <a:defRPr sz="1050" b="1">
+              <a:defRPr sz="1200" b="1">
                 <a:solidFill>
                   <a:srgbClr val="FFFFFF"/>
                 </a:solidFill>
@@ -1718,7 +1633,7 @@
               </a:defRPr>
             </a:pPr>
             <a:r>
-              <a:rPr sz="1050" b="1">
+              <a:rPr sz="1200" b="1">
                 <a:solidFill>
                   <a:srgbClr val="FFFFFF"/>
                 </a:solidFill>
@@ -1733,10 +1648,10 @@
       </p:sp>
       <p:sp>
         <p:nvSpPr>
-          <p:cNvPr id="15" name="">
+          <p:cNvPr id="12" name="PPAGENT_QA|parent=theory-domain-0|domains=theory-domains">
             <a:extLst xmlns:a="http://schemas.openxmlformats.org/drawingml/2006/main">
               <a:ext uri="{FF2B5EF4-FFF2-40B4-BE49-F238E27FC236}">
-                <a16:creationId xmlns:a16="http://schemas.microsoft.com/office/drawing/2014/main" id="{15A3CAC3-309D-4351-BF16-2089A62EF7CA}"/>
+                <a16:creationId xmlns:a16="http://schemas.microsoft.com/office/drawing/2014/main" id="{58A5FDDC-3130-415D-8D8B-1CA48394794C}"/>
               </a:ext>
             </a:extLst>
           </p:cNvPr>
@@ -1747,15 +1662,23 @@
         </p:nvSpPr>
         <p:spPr>
           <a:xfrm xmlns:a="http://schemas.openxmlformats.org/drawingml/2006/main">
-            <a:off x="1000125" y="2247900"/>
-            <a:ext cx="2762250" cy="1219200"/>
+            <a:off x="1038225" y="2152650"/>
+            <a:ext cx="2590800" cy="1028700"/>
           </a:xfrm>
           <a:prstGeom xmlns:a="http://schemas.openxmlformats.org/drawingml/2006/main" prst="ellipse">
             <a:avLst/>
           </a:prstGeom>
-          <a:solidFill xmlns:a="http://schemas.openxmlformats.org/drawingml/2006/main">
-            <a:srgbClr val="1F5C91"/>
-          </a:solidFill>
+          <a:gradFill xmlns:a="http://schemas.openxmlformats.org/drawingml/2006/main">
+            <a:gsLst>
+              <a:gs pos="0">
+                <a:srgbClr val="2F78B7"/>
+              </a:gs>
+              <a:gs pos="100000">
+                <a:srgbClr val="174A75"/>
+              </a:gs>
+            </a:gsLst>
+            <a:lin ang="10800000"/>
+          </a:gradFill>
           <a:ln xmlns:a="http://schemas.openxmlformats.org/drawingml/2006/main" w="19050">
             <a:solidFill>
               <a:srgbClr val="FFFFFF"/>
@@ -1766,16 +1689,16 @@
         <p:style>
           <a:lnRef xmlns:a="http://schemas.openxmlformats.org/drawingml/2006/main" idx="0"/>
           <a:fillRef xmlns:a="http://schemas.openxmlformats.org/drawingml/2006/main" idx="0"/>
-          <a:effectRef xmlns:a="http://schemas.openxmlformats.org/drawingml/2006/main" idx="6"/>
+          <a:effectRef xmlns:a="http://schemas.openxmlformats.org/drawingml/2006/main" idx="7"/>
           <a:fontRef xmlns:a="http://schemas.openxmlformats.org/drawingml/2006/main" idx="major"/>
         </p:style>
       </p:sp>
       <p:sp>
         <p:nvSpPr>
-          <p:cNvPr id="16" name="">
+          <p:cNvPr id="13" name="">
             <a:extLst xmlns:a="http://schemas.openxmlformats.org/drawingml/2006/main">
               <a:ext uri="{FF2B5EF4-FFF2-40B4-BE49-F238E27FC236}">
-                <a16:creationId xmlns:a16="http://schemas.microsoft.com/office/drawing/2014/main" id="{9FC6459D-184C-4842-9062-DE79C1423045}"/>
+                <a16:creationId xmlns:a16="http://schemas.microsoft.com/office/drawing/2014/main" id="{B634AD25-120A-404B-817D-715B2BE089AB}"/>
               </a:ext>
             </a:extLst>
           </p:cNvPr>
@@ -1786,8 +1709,8 @@
         </p:nvSpPr>
         <p:spPr>
           <a:xfrm xmlns:a="http://schemas.openxmlformats.org/drawingml/2006/main">
-            <a:off x="1238250" y="2457450"/>
-            <a:ext cx="2286000" cy="323850"/>
+            <a:off x="1228725" y="2305050"/>
+            <a:ext cx="2209800" cy="304800"/>
           </a:xfrm>
           <a:prstGeom xmlns:a="http://schemas.openxmlformats.org/drawingml/2006/main" prst="rect">
             <a:avLst/>
@@ -1805,7 +1728,7 @@
           <a:lstStyle xmlns:a="http://schemas.openxmlformats.org/drawingml/2006/main"/>
           <a:p xmlns:a="http://schemas.openxmlformats.org/drawingml/2006/main">
             <a:pPr algn="ctr">
-              <a:defRPr sz="1650" b="1">
+              <a:defRPr sz="1500" b="1">
                 <a:solidFill>
                   <a:srgbClr val="FFFFFF"/>
                 </a:solidFill>
@@ -1815,7 +1738,7 @@
               </a:defRPr>
             </a:pPr>
             <a:r>
-              <a:rPr sz="1650" b="1">
+              <a:rPr sz="1500" b="1">
                 <a:solidFill>
                   <a:srgbClr val="FFFFFF"/>
                 </a:solidFill>
@@ -1830,10 +1753,10 @@
       </p:sp>
       <p:sp>
         <p:nvSpPr>
-          <p:cNvPr id="17" name="">
+          <p:cNvPr id="14" name="">
             <a:extLst xmlns:a="http://schemas.openxmlformats.org/drawingml/2006/main">
               <a:ext uri="{FF2B5EF4-FFF2-40B4-BE49-F238E27FC236}">
-                <a16:creationId xmlns:a16="http://schemas.microsoft.com/office/drawing/2014/main" id="{8D3EF7C3-AC2E-412B-B0C3-2FB4E13C0545}"/>
+                <a16:creationId xmlns:a16="http://schemas.microsoft.com/office/drawing/2014/main" id="{EC3AC107-8F14-46CE-8BBB-6104272F9488}"/>
               </a:ext>
             </a:extLst>
           </p:cNvPr>
@@ -1844,8 +1767,8 @@
         </p:nvSpPr>
         <p:spPr>
           <a:xfrm xmlns:a="http://schemas.openxmlformats.org/drawingml/2006/main">
-            <a:off x="1276350" y="2857500"/>
-            <a:ext cx="2209800" cy="457200"/>
+            <a:off x="1266825" y="2647950"/>
+            <a:ext cx="2133600" cy="400050"/>
           </a:xfrm>
           <a:prstGeom xmlns:a="http://schemas.openxmlformats.org/drawingml/2006/main" prst="rect">
             <a:avLst/>
@@ -1863,7 +1786,7 @@
           <a:lstStyle xmlns:a="http://schemas.openxmlformats.org/drawingml/2006/main"/>
           <a:p xmlns:a="http://schemas.openxmlformats.org/drawingml/2006/main">
             <a:pPr algn="ctr">
-              <a:defRPr sz="975" b="0">
+              <a:defRPr sz="1200" b="0">
                 <a:solidFill>
                   <a:srgbClr val="E7F1FA"/>
                 </a:solidFill>
@@ -1873,7 +1796,7 @@
               </a:defRPr>
             </a:pPr>
             <a:r>
-              <a:rPr sz="975" b="0">
+              <a:rPr sz="1200" b="0">
                 <a:solidFill>
                   <a:srgbClr val="E7F1FA"/>
                 </a:solidFill>
@@ -1888,10 +1811,10 @@
       </p:sp>
       <p:sp>
         <p:nvSpPr>
-          <p:cNvPr id="18" name="">
+          <p:cNvPr id="15" name="PPAGENT_QA|parent=theory-domain-1|domains=theory-domains">
             <a:extLst xmlns:a="http://schemas.openxmlformats.org/drawingml/2006/main">
               <a:ext uri="{FF2B5EF4-FFF2-40B4-BE49-F238E27FC236}">
-                <a16:creationId xmlns:a16="http://schemas.microsoft.com/office/drawing/2014/main" id="{1F66CE8B-1F8D-4E3C-BDB4-6E076A52B7C3}"/>
+                <a16:creationId xmlns:a16="http://schemas.microsoft.com/office/drawing/2014/main" id="{8C5007C4-8407-427A-B4F3-8E772F0B1F2B}"/>
               </a:ext>
             </a:extLst>
           </p:cNvPr>
@@ -1902,15 +1825,23 @@
         </p:nvSpPr>
         <p:spPr>
           <a:xfrm xmlns:a="http://schemas.openxmlformats.org/drawingml/2006/main">
-            <a:off x="8429625" y="2247900"/>
-            <a:ext cx="2762250" cy="1219200"/>
+            <a:off x="8562975" y="2152650"/>
+            <a:ext cx="2590800" cy="1028700"/>
           </a:xfrm>
           <a:prstGeom xmlns:a="http://schemas.openxmlformats.org/drawingml/2006/main" prst="ellipse">
             <a:avLst/>
           </a:prstGeom>
-          <a:solidFill xmlns:a="http://schemas.openxmlformats.org/drawingml/2006/main">
-            <a:srgbClr val="2F73B5"/>
-          </a:solidFill>
+          <a:gradFill xmlns:a="http://schemas.openxmlformats.org/drawingml/2006/main">
+            <a:gsLst>
+              <a:gs pos="0">
+                <a:srgbClr val="3C87C7"/>
+              </a:gs>
+              <a:gs pos="100000">
+                <a:srgbClr val="1D5D93"/>
+              </a:gs>
+            </a:gsLst>
+            <a:lin ang="10800000"/>
+          </a:gradFill>
           <a:ln xmlns:a="http://schemas.openxmlformats.org/drawingml/2006/main" w="19050">
             <a:solidFill>
               <a:srgbClr val="FFFFFF"/>
@@ -1921,16 +1852,16 @@
         <p:style>
           <a:lnRef xmlns:a="http://schemas.openxmlformats.org/drawingml/2006/main" idx="0"/>
           <a:fillRef xmlns:a="http://schemas.openxmlformats.org/drawingml/2006/main" idx="0"/>
-          <a:effectRef xmlns:a="http://schemas.openxmlformats.org/drawingml/2006/main" idx="6"/>
+          <a:effectRef xmlns:a="http://schemas.openxmlformats.org/drawingml/2006/main" idx="7"/>
           <a:fontRef xmlns:a="http://schemas.openxmlformats.org/drawingml/2006/main" idx="major"/>
         </p:style>
       </p:sp>
       <p:sp>
         <p:nvSpPr>
-          <p:cNvPr id="19" name="">
+          <p:cNvPr id="16" name="">
             <a:extLst xmlns:a="http://schemas.openxmlformats.org/drawingml/2006/main">
               <a:ext uri="{FF2B5EF4-FFF2-40B4-BE49-F238E27FC236}">
-                <a16:creationId xmlns:a16="http://schemas.microsoft.com/office/drawing/2014/main" id="{1908A0AA-56A1-4857-9C29-A028D703CCB9}"/>
+                <a16:creationId xmlns:a16="http://schemas.microsoft.com/office/drawing/2014/main" id="{D7B7FB93-AB90-40F0-B86D-766CE21CA51C}"/>
               </a:ext>
             </a:extLst>
           </p:cNvPr>
@@ -1941,8 +1872,8 @@
         </p:nvSpPr>
         <p:spPr>
           <a:xfrm xmlns:a="http://schemas.openxmlformats.org/drawingml/2006/main">
-            <a:off x="8667750" y="2457450"/>
-            <a:ext cx="2286000" cy="323850"/>
+            <a:off x="8753475" y="2305050"/>
+            <a:ext cx="2209800" cy="304800"/>
           </a:xfrm>
           <a:prstGeom xmlns:a="http://schemas.openxmlformats.org/drawingml/2006/main" prst="rect">
             <a:avLst/>
@@ -1960,7 +1891,7 @@
           <a:lstStyle xmlns:a="http://schemas.openxmlformats.org/drawingml/2006/main"/>
           <a:p xmlns:a="http://schemas.openxmlformats.org/drawingml/2006/main">
             <a:pPr algn="ctr">
-              <a:defRPr sz="1650" b="1">
+              <a:defRPr sz="1500" b="1">
                 <a:solidFill>
                   <a:srgbClr val="FFFFFF"/>
                 </a:solidFill>
@@ -1970,7 +1901,7 @@
               </a:defRPr>
             </a:pPr>
             <a:r>
-              <a:rPr sz="1650" b="1">
+              <a:rPr sz="1500" b="1">
                 <a:solidFill>
                   <a:srgbClr val="FFFFFF"/>
                 </a:solidFill>
@@ -1985,10 +1916,10 @@
       </p:sp>
       <p:sp>
         <p:nvSpPr>
-          <p:cNvPr id="20" name="">
+          <p:cNvPr id="17" name="">
             <a:extLst xmlns:a="http://schemas.openxmlformats.org/drawingml/2006/main">
               <a:ext uri="{FF2B5EF4-FFF2-40B4-BE49-F238E27FC236}">
-                <a16:creationId xmlns:a16="http://schemas.microsoft.com/office/drawing/2014/main" id="{F2203402-7201-4FBE-9247-0739D1A2987F}"/>
+                <a16:creationId xmlns:a16="http://schemas.microsoft.com/office/drawing/2014/main" id="{9D43C9D5-87B4-4AAD-ACED-37F9294E3436}"/>
               </a:ext>
             </a:extLst>
           </p:cNvPr>
@@ -1999,8 +1930,8 @@
         </p:nvSpPr>
         <p:spPr>
           <a:xfrm xmlns:a="http://schemas.openxmlformats.org/drawingml/2006/main">
-            <a:off x="8705850" y="2857500"/>
-            <a:ext cx="2209800" cy="457200"/>
+            <a:off x="8791575" y="2647950"/>
+            <a:ext cx="2133600" cy="400050"/>
           </a:xfrm>
           <a:prstGeom xmlns:a="http://schemas.openxmlformats.org/drawingml/2006/main" prst="rect">
             <a:avLst/>
@@ -2018,7 +1949,7 @@
           <a:lstStyle xmlns:a="http://schemas.openxmlformats.org/drawingml/2006/main"/>
           <a:p xmlns:a="http://schemas.openxmlformats.org/drawingml/2006/main">
             <a:pPr algn="ctr">
-              <a:defRPr sz="975" b="0">
+              <a:defRPr sz="1200" b="0">
                 <a:solidFill>
                   <a:srgbClr val="E7F1FA"/>
                 </a:solidFill>
@@ -2028,7 +1959,7 @@
               </a:defRPr>
             </a:pPr>
             <a:r>
-              <a:rPr sz="975" b="0">
+              <a:rPr sz="1200" b="0">
                 <a:solidFill>
                   <a:srgbClr val="E7F1FA"/>
                 </a:solidFill>
@@ -2043,10 +1974,10 @@
       </p:sp>
       <p:sp>
         <p:nvSpPr>
-          <p:cNvPr id="21" name="">
+          <p:cNvPr id="18" name="PPAGENT_QA|parent=theory-domain-2|domains=theory-domains">
             <a:extLst xmlns:a="http://schemas.openxmlformats.org/drawingml/2006/main">
               <a:ext uri="{FF2B5EF4-FFF2-40B4-BE49-F238E27FC236}">
-                <a16:creationId xmlns:a16="http://schemas.microsoft.com/office/drawing/2014/main" id="{B5C6747D-99A3-41D2-A7E3-059AA1F1D9F3}"/>
+                <a16:creationId xmlns:a16="http://schemas.microsoft.com/office/drawing/2014/main" id="{A72C42B1-AC25-436C-BE4B-BD1FEAC6F18E}"/>
               </a:ext>
             </a:extLst>
           </p:cNvPr>
@@ -2057,15 +1988,23 @@
         </p:nvSpPr>
         <p:spPr>
           <a:xfrm xmlns:a="http://schemas.openxmlformats.org/drawingml/2006/main">
-            <a:off x="4714875" y="4914900"/>
-            <a:ext cx="2762250" cy="1219200"/>
+            <a:off x="4800600" y="5124450"/>
+            <a:ext cx="2590800" cy="1028700"/>
           </a:xfrm>
           <a:prstGeom xmlns:a="http://schemas.openxmlformats.org/drawingml/2006/main" prst="ellipse">
             <a:avLst/>
           </a:prstGeom>
-          <a:solidFill xmlns:a="http://schemas.openxmlformats.org/drawingml/2006/main">
-            <a:srgbClr val="1F5C91"/>
-          </a:solidFill>
+          <a:gradFill xmlns:a="http://schemas.openxmlformats.org/drawingml/2006/main">
+            <a:gsLst>
+              <a:gs pos="0">
+                <a:srgbClr val="2F78B7"/>
+              </a:gs>
+              <a:gs pos="100000">
+                <a:srgbClr val="174A75"/>
+              </a:gs>
+            </a:gsLst>
+            <a:lin ang="10800000"/>
+          </a:gradFill>
           <a:ln xmlns:a="http://schemas.openxmlformats.org/drawingml/2006/main" w="19050">
             <a:solidFill>
               <a:srgbClr val="FFFFFF"/>
@@ -2076,16 +2015,16 @@
         <p:style>
           <a:lnRef xmlns:a="http://schemas.openxmlformats.org/drawingml/2006/main" idx="0"/>
           <a:fillRef xmlns:a="http://schemas.openxmlformats.org/drawingml/2006/main" idx="0"/>
-          <a:effectRef xmlns:a="http://schemas.openxmlformats.org/drawingml/2006/main" idx="6"/>
+          <a:effectRef xmlns:a="http://schemas.openxmlformats.org/drawingml/2006/main" idx="7"/>
           <a:fontRef xmlns:a="http://schemas.openxmlformats.org/drawingml/2006/main" idx="major"/>
         </p:style>
       </p:sp>
       <p:sp>
         <p:nvSpPr>
-          <p:cNvPr id="22" name="">
+          <p:cNvPr id="19" name="">
             <a:extLst xmlns:a="http://schemas.openxmlformats.org/drawingml/2006/main">
               <a:ext uri="{FF2B5EF4-FFF2-40B4-BE49-F238E27FC236}">
-                <a16:creationId xmlns:a16="http://schemas.microsoft.com/office/drawing/2014/main" id="{33A63493-1EEF-4B79-A986-9787DD2697EF}"/>
+                <a16:creationId xmlns:a16="http://schemas.microsoft.com/office/drawing/2014/main" id="{E229810C-3FAC-4432-9071-3FE63546AF8F}"/>
               </a:ext>
             </a:extLst>
           </p:cNvPr>
@@ -2096,8 +2035,8 @@
         </p:nvSpPr>
         <p:spPr>
           <a:xfrm xmlns:a="http://schemas.openxmlformats.org/drawingml/2006/main">
-            <a:off x="4953000" y="5124450"/>
-            <a:ext cx="2286000" cy="323850"/>
+            <a:off x="4991100" y="5276850"/>
+            <a:ext cx="2209800" cy="304800"/>
           </a:xfrm>
           <a:prstGeom xmlns:a="http://schemas.openxmlformats.org/drawingml/2006/main" prst="rect">
             <a:avLst/>
@@ -2115,7 +2054,7 @@
           <a:lstStyle xmlns:a="http://schemas.openxmlformats.org/drawingml/2006/main"/>
           <a:p xmlns:a="http://schemas.openxmlformats.org/drawingml/2006/main">
             <a:pPr algn="ctr">
-              <a:defRPr sz="1650" b="1">
+              <a:defRPr sz="1500" b="1">
                 <a:solidFill>
                   <a:srgbClr val="FFFFFF"/>
                 </a:solidFill>
@@ -2125,7 +2064,7 @@
               </a:defRPr>
             </a:pPr>
             <a:r>
-              <a:rPr sz="1650" b="1">
+              <a:rPr sz="1500" b="1">
                 <a:solidFill>
                   <a:srgbClr val="FFFFFF"/>
                 </a:solidFill>
@@ -2140,10 +2079,10 @@
       </p:sp>
       <p:sp>
         <p:nvSpPr>
-          <p:cNvPr id="23" name="">
+          <p:cNvPr id="20" name="">
             <a:extLst xmlns:a="http://schemas.openxmlformats.org/drawingml/2006/main">
               <a:ext uri="{FF2B5EF4-FFF2-40B4-BE49-F238E27FC236}">
-                <a16:creationId xmlns:a16="http://schemas.microsoft.com/office/drawing/2014/main" id="{11370EA2-1C67-4628-9027-845BE6812128}"/>
+                <a16:creationId xmlns:a16="http://schemas.microsoft.com/office/drawing/2014/main" id="{7466BDB5-2DF7-4948-B850-2210A63C140D}"/>
               </a:ext>
             </a:extLst>
           </p:cNvPr>
@@ -2154,8 +2093,8 @@
         </p:nvSpPr>
         <p:spPr>
           <a:xfrm xmlns:a="http://schemas.openxmlformats.org/drawingml/2006/main">
-            <a:off x="4991100" y="5524500"/>
-            <a:ext cx="2209800" cy="457200"/>
+            <a:off x="5029200" y="5619750"/>
+            <a:ext cx="2133600" cy="400050"/>
           </a:xfrm>
           <a:prstGeom xmlns:a="http://schemas.openxmlformats.org/drawingml/2006/main" prst="rect">
             <a:avLst/>
@@ -2173,7 +2112,7 @@
           <a:lstStyle xmlns:a="http://schemas.openxmlformats.org/drawingml/2006/main"/>
           <a:p xmlns:a="http://schemas.openxmlformats.org/drawingml/2006/main">
             <a:pPr algn="ctr">
-              <a:defRPr sz="975" b="0">
+              <a:defRPr sz="1200" b="0">
                 <a:solidFill>
                   <a:srgbClr val="E7F1FA"/>
                 </a:solidFill>
@@ -2183,7 +2122,7 @@
               </a:defRPr>
             </a:pPr>
             <a:r>
-              <a:rPr sz="975" b="0">
+              <a:rPr sz="1200" b="0">
                 <a:solidFill>
                   <a:srgbClr val="E7F1FA"/>
                 </a:solidFill>
@@ -2199,7 +2138,7 @@
     </p:spTree>
     <p:extLst>
       <p:ext uri="{BB962C8B-B14F-4D97-AF65-F5344CB8AC3E}">
-        <p14:creationId xmlns:p14="http://schemas.microsoft.com/office/powerpoint/2010/main" val="1864928941"/>
+        <p14:creationId xmlns:p14="http://schemas.microsoft.com/office/powerpoint/2010/main" val="1679954626"/>
       </p:ext>
     </p:extLst>
   </p:cSld>
